--- a/Phase3_Slides.pptx
+++ b/Phase3_Slides.pptx
@@ -4669,7 +4669,7 @@
                 </a:solidFill>
                 <a:latin typeface="Inter"/>
               </a:rPr>
-              <a:t>Sonnet plans, Haiku executes.    $0.029 / query — 53% cheaper than all-Sonnet, 22 pts more accurate than all-Haiku.</a:t>
+              <a:t>Sonnet plans, Haiku executes.    $0.029 / query — 53% cheaper than all-Sonnet, 20 pts more accurate than all-Haiku.</a:t>
             </a:r>
           </a:p>
         </p:txBody>

--- a/Phase3_Slides.pptx
+++ b/Phase3_Slides.pptx
@@ -7687,7 +7687,7 @@
                 </a:solidFill>
                 <a:latin typeface="JetBrains Mono"/>
               </a:rPr>
-              <a:t>22 files  ·  9 .py + 10 .md + 2 .json + 1 .ipynb</a:t>
+              <a:t>22 files  ·  9 .py + 9 .md + 2 .json + 1 .ipynb + 1 .txt</a:t>
             </a:r>
           </a:p>
         </p:txBody>

--- a/Phase3_Slides.pptx
+++ b/Phase3_Slides.pptx
@@ -7648,7 +7648,7 @@
                 </a:solidFill>
                 <a:latin typeface="JetBrains Mono"/>
               </a:rPr>
-              <a:t>repo</a:t>
+              <a:t>ph 2</a:t>
             </a:r>
           </a:p>
         </p:txBody>
@@ -7687,7 +7687,7 @@
                 </a:solidFill>
                 <a:latin typeface="JetBrains Mono"/>
               </a:rPr>
-              <a:t>22 files  ·  9 .py + 9 .md + 2 .json + 1 .ipynb + 1 .txt</a:t>
+              <a:t>22 deliverables  ·  9 .py + 9 .md + 2 .json + 1 .ipynb + 1 .txt</a:t>
             </a:r>
           </a:p>
         </p:txBody>
